--- a/docs/02_User_Manual_Summary.pptx
+++ b/docs/02_User_Manual_Summary.pptx
@@ -3302,7 +3302,7 @@
                 </a:solidFill>
                 <a:latin typeface="Segoe UI"/>
               </a:rPr>
-              <a:t>A guide to the P3MAI website — summary</a:t>
+              <a:t>A guide to the P3MAI website — summary (v2.0)</a:t>
             </a:r>
           </a:p>
         </p:txBody>
@@ -3490,7 +3490,7 @@
                 </a:solidFill>
                 <a:latin typeface="Segoe UI"/>
               </a:rPr>
-              <a:t>Five pages + a standalone estimator.</a:t>
+              <a:t>5 main areas → 3 service pages, 4 articles, the estimator, 6 live apps.</a:t>
             </a:r>
           </a:p>
         </p:txBody>
@@ -3511,8 +3511,8 @@
         </p:blipFill>
         <p:spPr>
           <a:xfrm>
-            <a:off x="2581737" y="2057400"/>
-            <a:ext cx="7028220" cy="4297680"/>
+            <a:off x="2573028" y="2057400"/>
+            <a:ext cx="7045638" cy="4297680"/>
           </a:xfrm>
           <a:prstGeom prst="rect">
             <a:avLst/>
@@ -3744,7 +3744,7 @@
                 </a:solidFill>
                 <a:latin typeface="Segoe UI"/>
               </a:rPr>
-              <a:t>•  Home — intro, track record, call to action.</a:t>
+              <a:t>•  Home — problem-led hero, named clients, story, track record, the 3-step ladder.</a:t>
             </a:r>
           </a:p>
           <a:p>
@@ -3763,7 +3763,7 @@
                 </a:solidFill>
                 <a:latin typeface="Segoe UI"/>
               </a:rPr>
-              <a:t>•  About — bio, career timeline, certifications.</a:t>
+              <a:t>•  About — nine industries, six-milestone timeline, sovereign-and-safe credentials.</a:t>
             </a:r>
           </a:p>
           <a:p>
@@ -3782,7 +3782,7 @@
                 </a:solidFill>
                 <a:latin typeface="Segoe UI"/>
               </a:rPr>
-              <a:t>•  Services — Program / Project / PMO cards + comparison.</a:t>
+              <a:t>•  Services — 3 cards with who-it's-for, Service Details pages, 6 app buttons.</a:t>
             </a:r>
           </a:p>
           <a:p>
@@ -3801,7 +3801,7 @@
                 </a:solidFill>
                 <a:latin typeface="Segoe UI"/>
               </a:rPr>
-              <a:t>•  Blog — AI / PM articles.</a:t>
+              <a:t>•  Blog — 4 posts, each with a full Read-more article.</a:t>
             </a:r>
           </a:p>
           <a:p>
@@ -3820,7 +3820,7 @@
                 </a:solidFill>
                 <a:latin typeface="Segoe UI"/>
               </a:rPr>
-              <a:t>•  Contact — validated form, details, map.</a:t>
+              <a:t>•  Contact — the form knows where you came from; enquiries email P3MAI directly.</a:t>
             </a:r>
           </a:p>
         </p:txBody>
@@ -3964,7 +3964,7 @@
                 </a:solidFill>
                 <a:latin typeface="Segoe UI Semibold"/>
               </a:rPr>
-              <a:t>Services page — the two apps</a:t>
+              <a:t>Services Cost Estimator</a:t>
             </a:r>
           </a:p>
         </p:txBody>
@@ -4021,8 +4021,50 @@
         </p:nvSpPr>
         <p:spPr>
           <a:xfrm>
-            <a:off x="640080" y="1600200"/>
-            <a:ext cx="10972800" cy="4251960"/>
+            <a:off x="566928" y="1600200"/>
+            <a:ext cx="11064240" cy="640080"/>
+          </a:xfrm>
+          <a:prstGeom prst="rect">
+            <a:avLst/>
+          </a:prstGeom>
+          <a:noFill/>
+        </p:spPr>
+        <p:txBody>
+          <a:bodyPr wrap="square" anchor="t">
+            <a:spAutoFit/>
+          </a:bodyPr>
+          <a:lstStyle/>
+          <a:p>
+            <a:pPr algn="l">
+              <a:spcBef>
+                <a:spcPts val="0"/>
+              </a:spcBef>
+              <a:spcAft>
+                <a:spcPts val="600"/>
+              </a:spcAft>
+            </a:pPr>
+            <a:r>
+              <a:rPr sz="1500" b="0">
+                <a:solidFill>
+                  <a:srgbClr val="5B6675"/>
+                </a:solidFill>
+                <a:latin typeface="Segoe UI"/>
+              </a:rPr>
+              <a:t>P3MAI's real catalogue, priced interactively.</a:t>
+            </a:r>
+          </a:p>
+        </p:txBody>
+      </p:sp>
+      <p:sp>
+        <p:nvSpPr>
+          <p:cNvPr id="5" name="TextBox 4"/>
+          <p:cNvSpPr txBox="1"/>
+          <p:nvPr/>
+        </p:nvSpPr>
+        <p:spPr>
+          <a:xfrm>
+            <a:off x="640080" y="2377440"/>
+            <a:ext cx="10972800" cy="3474720"/>
           </a:xfrm>
           <a:prstGeom prst="rect">
             <a:avLst/>
@@ -4050,7 +4092,7 @@
                 </a:solidFill>
                 <a:latin typeface="Segoe UI"/>
               </a:rPr>
-              <a:t>•  Project Management card → PRINCE2 Method Map.</a:t>
+              <a:t>•  Pick a service line, products, POTI dimensions, tier, licence, days, maintenance.</a:t>
             </a:r>
           </a:p>
           <a:p>
@@ -4069,7 +4111,7 @@
                 </a:solidFill>
                 <a:latin typeface="Segoe UI"/>
               </a:rPr>
-              <a:t>•  PMO card → Example → the PMO Service app.</a:t>
+              <a:t>•  Live totals in AED / GBP / USD in the summary rail.</a:t>
             </a:r>
           </a:p>
           <a:p>
@@ -4088,14 +4130,33 @@
                 </a:solidFill>
                 <a:latin typeface="Segoe UI"/>
               </a:rPr>
-              <a:t>•  Each app links back to the website.</a:t>
-            </a:r>
-          </a:p>
-        </p:txBody>
-      </p:sp>
-      <p:sp>
-        <p:nvSpPr>
-          <p:cNvPr id="5" name="TextBox 4"/>
+              <a:t>•  Get a Detailed Quote → contact form with your full basket pre-written.</a:t>
+            </a:r>
+          </a:p>
+          <a:p>
+            <a:pPr algn="l">
+              <a:spcBef>
+                <a:spcPts val="0"/>
+              </a:spcBef>
+              <a:spcAft>
+                <a:spcPts val="1200"/>
+              </a:spcAft>
+            </a:pPr>
+            <a:r>
+              <a:rPr sz="1700" b="0">
+                <a:solidFill>
+                  <a:srgbClr val="1C2B3A"/>
+                </a:solidFill>
+                <a:latin typeface="Segoe UI"/>
+              </a:rPr>
+              <a:t>•  Nothing stored until you choose to send.</a:t>
+            </a:r>
+          </a:p>
+        </p:txBody>
+      </p:sp>
+      <p:sp>
+        <p:nvSpPr>
+          <p:cNvPr id="6" name="TextBox 5"/>
           <p:cNvSpPr txBox="1"/>
           <p:nvPr/>
         </p:nvSpPr>
@@ -4137,7 +4198,7 @@
       </p:sp>
       <p:sp>
         <p:nvSpPr>
-          <p:cNvPr id="6" name="TextBox 5"/>
+          <p:cNvPr id="7" name="TextBox 6"/>
           <p:cNvSpPr txBox="1"/>
           <p:nvPr/>
         </p:nvSpPr>
@@ -4232,7 +4293,7 @@
                 </a:solidFill>
                 <a:latin typeface="Segoe UI Semibold"/>
               </a:rPr>
-              <a:t>Project Cost Estimator</a:t>
+              <a:t>The six apps (all free to explore)</a:t>
             </a:r>
           </a:p>
         </p:txBody>
@@ -4289,8 +4350,107 @@
         </p:nvSpPr>
         <p:spPr>
           <a:xfrm>
-            <a:off x="566928" y="1600200"/>
-            <a:ext cx="11064240" cy="640080"/>
+            <a:off x="640080" y="1600200"/>
+            <a:ext cx="10972800" cy="4251960"/>
+          </a:xfrm>
+          <a:prstGeom prst="rect">
+            <a:avLst/>
+          </a:prstGeom>
+          <a:noFill/>
+        </p:spPr>
+        <p:txBody>
+          <a:bodyPr wrap="square" anchor="t">
+            <a:spAutoFit/>
+          </a:bodyPr>
+          <a:lstStyle/>
+          <a:p>
+            <a:pPr algn="l">
+              <a:spcBef>
+                <a:spcPts val="0"/>
+              </a:spcBef>
+              <a:spcAft>
+                <a:spcPts val="1200"/>
+              </a:spcAft>
+            </a:pPr>
+            <a:r>
+              <a:rPr sz="1700" b="0">
+                <a:solidFill>
+                  <a:srgbClr val="1C2B3A"/>
+                </a:solidFill>
+                <a:latin typeface="Segoe UI"/>
+              </a:rPr>
+              <a:t>•  PMO Example + P3M3 Maturity Assessment (PMO card).</a:t>
+            </a:r>
+          </a:p>
+          <a:p>
+            <a:pPr algn="l">
+              <a:spcBef>
+                <a:spcPts val="0"/>
+              </a:spcBef>
+              <a:spcAft>
+                <a:spcPts val="1200"/>
+              </a:spcAft>
+            </a:pPr>
+            <a:r>
+              <a:rPr sz="1700" b="0">
+                <a:solidFill>
+                  <a:srgbClr val="1C2B3A"/>
+                </a:solidFill>
+                <a:latin typeface="Segoe UI"/>
+              </a:rPr>
+              <a:t>•  PRINCE2 / SAFe / PMBOK Method Maps (Project card).</a:t>
+            </a:r>
+          </a:p>
+          <a:p>
+            <a:pPr algn="l">
+              <a:spcBef>
+                <a:spcPts val="0"/>
+              </a:spcBef>
+              <a:spcAft>
+                <a:spcPts val="1200"/>
+              </a:spcAft>
+            </a:pPr>
+            <a:r>
+              <a:rPr sz="1700" b="0">
+                <a:solidFill>
+                  <a:srgbClr val="1C2B3A"/>
+                </a:solidFill>
+                <a:latin typeface="Segoe UI"/>
+              </a:rPr>
+              <a:t>•  MSP Method Map (Program card).</a:t>
+            </a:r>
+          </a:p>
+          <a:p>
+            <a:pPr algn="l">
+              <a:spcBef>
+                <a:spcPts val="0"/>
+              </a:spcBef>
+              <a:spcAft>
+                <a:spcPts val="1200"/>
+              </a:spcAft>
+            </a:pPr>
+            <a:r>
+              <a:rPr sz="1700" b="0">
+                <a:solidFill>
+                  <a:srgbClr val="1C2B3A"/>
+                </a:solidFill>
+                <a:latin typeface="Segoe UI"/>
+              </a:rPr>
+              <a:t>•  All at apps.p3mai.com/&lt;slug&gt;; each links back to the site.</a:t>
+            </a:r>
+          </a:p>
+        </p:txBody>
+      </p:sp>
+      <p:sp>
+        <p:nvSpPr>
+          <p:cNvPr id="5" name="TextBox 4"/>
+          <p:cNvSpPr txBox="1"/>
+          <p:nvPr/>
+        </p:nvSpPr>
+        <p:spPr>
+          <a:xfrm>
+            <a:off x="320040" y="6419088"/>
+            <a:ext cx="3657600" cy="365760"/>
           </a:xfrm>
           <a:prstGeom prst="rect">
             <a:avLst/>
@@ -4312,128 +4472,6 @@
               </a:spcAft>
             </a:pPr>
             <a:r>
-              <a:rPr sz="1500" b="0">
-                <a:solidFill>
-                  <a:srgbClr val="5B6675"/>
-                </a:solidFill>
-                <a:latin typeface="Segoe UI"/>
-              </a:rPr>
-              <a:t>A quick, private guide to likely project cost.</a:t>
-            </a:r>
-          </a:p>
-        </p:txBody>
-      </p:sp>
-      <p:sp>
-        <p:nvSpPr>
-          <p:cNvPr id="5" name="TextBox 4"/>
-          <p:cNvSpPr txBox="1"/>
-          <p:nvPr/>
-        </p:nvSpPr>
-        <p:spPr>
-          <a:xfrm>
-            <a:off x="640080" y="2377440"/>
-            <a:ext cx="10972800" cy="3474720"/>
-          </a:xfrm>
-          <a:prstGeom prst="rect">
-            <a:avLst/>
-          </a:prstGeom>
-          <a:noFill/>
-        </p:spPr>
-        <p:txBody>
-          <a:bodyPr wrap="square" anchor="t">
-            <a:spAutoFit/>
-          </a:bodyPr>
-          <a:lstStyle/>
-          <a:p>
-            <a:pPr algn="l">
-              <a:spcBef>
-                <a:spcPts val="0"/>
-              </a:spcBef>
-              <a:spcAft>
-                <a:spcPts val="1200"/>
-              </a:spcAft>
-            </a:pPr>
-            <a:r>
-              <a:rPr sz="1700" b="0">
-                <a:solidFill>
-                  <a:srgbClr val="1C2B3A"/>
-                </a:solidFill>
-                <a:latin typeface="Segoe UI"/>
-              </a:rPr>
-              <a:t>•  A standalone interactive calculator.</a:t>
-            </a:r>
-          </a:p>
-          <a:p>
-            <a:pPr algn="l">
-              <a:spcBef>
-                <a:spcPts val="0"/>
-              </a:spcBef>
-              <a:spcAft>
-                <a:spcPts val="1200"/>
-              </a:spcAft>
-            </a:pPr>
-            <a:r>
-              <a:rPr sz="1700" b="0">
-                <a:solidFill>
-                  <a:srgbClr val="1C2B3A"/>
-                </a:solidFill>
-                <a:latin typeface="Segoe UI"/>
-              </a:rPr>
-              <a:t>•  Pick options → instant estimate in real time.</a:t>
-            </a:r>
-          </a:p>
-          <a:p>
-            <a:pPr algn="l">
-              <a:spcBef>
-                <a:spcPts val="0"/>
-              </a:spcBef>
-              <a:spcAft>
-                <a:spcPts val="1200"/>
-              </a:spcAft>
-            </a:pPr>
-            <a:r>
-              <a:rPr sz="1700" b="0">
-                <a:solidFill>
-                  <a:srgbClr val="1C2B3A"/>
-                </a:solidFill>
-                <a:latin typeface="Segoe UI"/>
-              </a:rPr>
-              <a:t>•  Nothing stored; points you to hello@P3MAI.com.</a:t>
-            </a:r>
-          </a:p>
-        </p:txBody>
-      </p:sp>
-      <p:sp>
-        <p:nvSpPr>
-          <p:cNvPr id="6" name="TextBox 5"/>
-          <p:cNvSpPr txBox="1"/>
-          <p:nvPr/>
-        </p:nvSpPr>
-        <p:spPr>
-          <a:xfrm>
-            <a:off x="320040" y="6419088"/>
-            <a:ext cx="3657600" cy="365760"/>
-          </a:xfrm>
-          <a:prstGeom prst="rect">
-            <a:avLst/>
-          </a:prstGeom>
-          <a:noFill/>
-        </p:spPr>
-        <p:txBody>
-          <a:bodyPr wrap="square" anchor="t">
-            <a:spAutoFit/>
-          </a:bodyPr>
-          <a:lstStyle/>
-          <a:p>
-            <a:pPr algn="l">
-              <a:spcBef>
-                <a:spcPts val="0"/>
-              </a:spcBef>
-              <a:spcAft>
-                <a:spcPts val="600"/>
-              </a:spcAft>
-            </a:pPr>
-            <a:r>
               <a:rPr sz="900" b="1">
                 <a:solidFill>
                   <a:srgbClr val="A8841C"/>
@@ -4447,7 +4485,7 @@
       </p:sp>
       <p:sp>
         <p:nvSpPr>
-          <p:cNvPr id="7" name="TextBox 6"/>
+          <p:cNvPr id="6" name="TextBox 5"/>
           <p:cNvSpPr txBox="1"/>
           <p:nvPr/>
         </p:nvSpPr>
@@ -4628,7 +4666,7 @@
                 </a:solidFill>
                 <a:latin typeface="Segoe UI"/>
               </a:rPr>
-              <a:t>•  Fully responsive — works on mobile with a hamburger menu.</a:t>
+              <a:t>•  Start Where It Suits You: free tools → products → talk to Douglas.</a:t>
             </a:r>
           </a:p>
           <a:p>
@@ -4647,7 +4685,7 @@
                 </a:solidFill>
                 <a:latin typeface="Segoe UI"/>
               </a:rPr>
-              <a:t>•  The estimate is indicative — contact P3MAI for a tailored quote.</a:t>
+              <a:t>•  Estimates are indicative — final pricing follows a scoping conversation.</a:t>
             </a:r>
           </a:p>
           <a:p>
@@ -4666,7 +4704,7 @@
                 </a:solidFill>
                 <a:latin typeface="Segoe UI"/>
               </a:rPr>
-              <a:t>•  Consistent navy/gold header &amp; footer throughout.</a:t>
+              <a:t>•  Fully responsive; consistent navy/gold shell throughout.</a:t>
             </a:r>
           </a:p>
         </p:txBody>

--- a/docs/02_User_Manual_Summary.pptx
+++ b/docs/02_User_Manual_Summary.pptx
@@ -3218,7 +3218,7 @@
                 </a:solidFill>
                 <a:latin typeface="Segoe UI Semibold"/>
               </a:rPr>
-              <a:t>P3MAI  ·  METHOD MAP</a:t>
+              <a:t>P3MAI  ·  WEBSITE</a:t>
             </a:r>
           </a:p>
         </p:txBody>
